--- a/Gemini/sermon_ppt/template.pptx
+++ b/Gemini/sermon_ppt/template.pptx
@@ -888,17 +888,9 @@
 <p:sldLayout xmlns:a="http://schemas.openxmlformats.org/drawingml/2006/main" xmlns:r="http://schemas.openxmlformats.org/officeDocument/2006/relationships" xmlns:p="http://schemas.openxmlformats.org/presentationml/2006/main" preserve="1" userDrawn="1">
   <p:cSld name="3_兩行字幕0329">
     <p:bg>
-      <p:bgPr>
-        <a:pattFill prst="pct25">
-          <a:fgClr>
-            <a:schemeClr val="accent1"/>
-          </a:fgClr>
-          <a:bgClr>
-            <a:schemeClr val="bg1"/>
-          </a:bgClr>
-        </a:pattFill>
-        <a:effectLst/>
-      </p:bgPr>
+      <p:bgRef idx="1001">
+        <a:schemeClr val="bg1"/>
+      </p:bgRef>
     </p:bg>
     <p:spTree>
       <p:nvGrpSpPr>
